--- a/media/resources/files/Onduktar_KoshuuBingo.pptx
+++ b/media/resources/files/Onduktar_KoshuuBingo.pptx
@@ -38279,7 +38279,7 @@
             </a:pPr>
             <a:r>
               <a:rPr lang="ru-RU" dirty="0"/>
-              <a:t>Турдуу пикирлер учун ыраазычылык билдиребиз.</a:t>
+              <a:t>Түрдүү пикирлер үчүн ыраазычылык билдиребиз.</a:t>
             </a:r>
           </a:p>
           <a:p>

--- a/media/resources/files/Onduktar_KoshuuBingo.pptx
+++ b/media/resources/files/Onduktar_KoshuuBingo.pptx
@@ -10014,7 +10014,7 @@
                 <a:ea typeface="+mn-ea"/>
                 <a:cs typeface="+mn-cs"/>
               </a:rPr>
-              <a:t>Бинго ,жооптору менен</a:t>
+              <a:t>Бинго,жооптору менен</a:t>
             </a:r>
             <a:endParaRPr kumimoji="0" lang="en-US" sz="1800" b="0" i="0" u="none" strike="noStrike" kern="1200" cap="none" spc="0" normalizeH="0" baseline="0" noProof="0" dirty="0">
               <a:ln>
@@ -10097,7 +10097,7 @@
                 <a:ea typeface="+mn-ea"/>
                 <a:cs typeface="+mn-cs"/>
               </a:rPr>
-              <a:t>Окуучулар </a:t>
+              <a:t>Окуучулар тордон тогуз жоопту тандап, дептердеги 3х3 чакмакка каалагандай коюшат.</a:t>
             </a:r>
             <a:r>
               <a:rPr kumimoji="0" lang="ru-RU" sz="2000" b="0" i="0" u="none" strike="noStrike" kern="1200" cap="none" spc="0" normalizeH="0" baseline="0" noProof="0" dirty="0">
@@ -10114,7 +10114,7 @@
                 <a:ea typeface="+mn-ea"/>
                 <a:cs typeface="+mn-cs"/>
               </a:rPr>
-              <a:t>суроо</a:t>
+              <a:t/>
             </a:r>
             <a:r>
               <a:rPr kumimoji="0" lang="en-US" sz="2000" b="0" i="0" u="none" strike="noStrike" kern="1200" cap="none" spc="0" normalizeH="0" baseline="0" noProof="0" dirty="0">
@@ -10131,7 +10131,7 @@
                 <a:ea typeface="+mn-ea"/>
                 <a:cs typeface="+mn-cs"/>
               </a:rPr>
-              <a:t> </a:t>
+              <a:t/>
             </a:r>
             <a:r>
               <a:rPr kumimoji="0" lang="en-US" sz="2000" b="0" i="0" u="none" strike="noStrike" kern="1200" cap="none" spc="0" normalizeH="0" baseline="0" noProof="0" dirty="0" err="1">
@@ -10148,7 +10148,7 @@
                 <a:ea typeface="+mn-ea"/>
                 <a:cs typeface="+mn-cs"/>
               </a:rPr>
-              <a:t>тордон</a:t>
+              <a:t/>
             </a:r>
             <a:r>
               <a:rPr kumimoji="0" lang="en-US" sz="2000" b="0" i="0" u="none" strike="noStrike" kern="1200" cap="none" spc="0" normalizeH="0" baseline="0" noProof="0" dirty="0">
@@ -10165,7 +10165,7 @@
                 <a:ea typeface="+mn-ea"/>
                 <a:cs typeface="+mn-cs"/>
               </a:rPr>
-              <a:t> </a:t>
+              <a:t/>
             </a:r>
             <a:r>
               <a:rPr kumimoji="0" lang="en-US" sz="1800" b="0" i="0" u="none" strike="noStrike" kern="1200" cap="none" spc="0" normalizeH="0" baseline="0" noProof="0" dirty="0" err="1">
@@ -10182,7 +10182,7 @@
                 <a:ea typeface="+mn-ea"/>
                 <a:cs typeface="+mn-cs"/>
               </a:rPr>
-              <a:t>тогуз</a:t>
+              <a:t/>
             </a:r>
             <a:r>
               <a:rPr kumimoji="0" lang="en-US" sz="1800" b="0" i="0" u="none" strike="noStrike" kern="1200" cap="none" spc="0" normalizeH="0" baseline="0" noProof="0" dirty="0">
@@ -10199,7 +10199,7 @@
                 <a:ea typeface="+mn-ea"/>
                 <a:cs typeface="+mn-cs"/>
               </a:rPr>
-              <a:t> </a:t>
+              <a:t/>
             </a:r>
             <a:r>
               <a:rPr kumimoji="0" lang="en-US" sz="1800" b="0" i="0" u="none" strike="noStrike" kern="1200" cap="none" spc="0" normalizeH="0" baseline="0" noProof="0" dirty="0" err="1">
@@ -10216,7 +10216,7 @@
                 <a:ea typeface="+mn-ea"/>
                 <a:cs typeface="+mn-cs"/>
               </a:rPr>
-              <a:t>жоопту</a:t>
+              <a:t/>
             </a:r>
             <a:r>
               <a:rPr kumimoji="0" lang="en-US" sz="1800" b="0" i="0" u="none" strike="noStrike" kern="1200" cap="none" spc="0" normalizeH="0" baseline="0" noProof="0" dirty="0">
@@ -10233,7 +10233,7 @@
                 <a:ea typeface="+mn-ea"/>
                 <a:cs typeface="+mn-cs"/>
               </a:rPr>
-              <a:t> </a:t>
+              <a:t/>
             </a:r>
             <a:r>
               <a:rPr kumimoji="0" lang="en-US" sz="1800" b="0" i="0" u="none" strike="noStrike" kern="1200" cap="none" spc="0" normalizeH="0" baseline="0" noProof="0" dirty="0" err="1">
@@ -10250,7 +10250,7 @@
                 <a:ea typeface="+mn-ea"/>
                 <a:cs typeface="+mn-cs"/>
               </a:rPr>
-              <a:t>тандап</a:t>
+              <a:t/>
             </a:r>
             <a:r>
               <a:rPr kumimoji="0" lang="en-US" sz="1800" b="0" i="0" u="none" strike="noStrike" kern="1200" cap="none" spc="0" normalizeH="0" baseline="0" noProof="0" dirty="0">
@@ -10267,7 +10267,7 @@
                 <a:ea typeface="+mn-ea"/>
                 <a:cs typeface="+mn-cs"/>
               </a:rPr>
-              <a:t>, </a:t>
+              <a:t/>
             </a:r>
             <a:r>
               <a:rPr kumimoji="0" lang="en-US" sz="1800" b="0" i="0" u="none" strike="noStrike" kern="1200" cap="none" spc="0" normalizeH="0" baseline="0" noProof="0" dirty="0" err="1">
@@ -10284,7 +10284,7 @@
                 <a:ea typeface="+mn-ea"/>
                 <a:cs typeface="+mn-cs"/>
               </a:rPr>
-              <a:t>аларды</a:t>
+              <a:t/>
             </a:r>
             <a:r>
               <a:rPr kumimoji="0" lang="en-US" sz="1800" b="0" i="0" u="none" strike="noStrike" kern="1200" cap="none" spc="0" normalizeH="0" baseline="0" noProof="0" dirty="0">
@@ -10301,7 +10301,7 @@
                 <a:ea typeface="+mn-ea"/>
                 <a:cs typeface="+mn-cs"/>
               </a:rPr>
-              <a:t> </a:t>
+              <a:t/>
             </a:r>
             <a:r>
               <a:rPr kumimoji="0" lang="ru-RU" sz="1800" b="0" i="0" u="none" strike="noStrike" kern="1200" cap="none" spc="0" normalizeH="0" baseline="0" noProof="0" dirty="0">
@@ -10318,7 +10318,7 @@
                 <a:ea typeface="+mn-ea"/>
                 <a:cs typeface="+mn-cs"/>
               </a:rPr>
-              <a:t>дептериндеги</a:t>
+              <a:t/>
             </a:r>
             <a:r>
               <a:rPr kumimoji="0" lang="en-US" sz="1800" b="0" i="0" u="none" strike="noStrike" kern="1200" cap="none" spc="0" normalizeH="0" baseline="0" noProof="0" dirty="0">
@@ -10335,7 +10335,7 @@
                 <a:ea typeface="+mn-ea"/>
                 <a:cs typeface="+mn-cs"/>
               </a:rPr>
-              <a:t> 3х3 </a:t>
+              <a:t/>
             </a:r>
             <a:r>
               <a:rPr kumimoji="0" lang="en-US" sz="1800" b="0" i="0" u="none" strike="noStrike" kern="1200" cap="none" spc="0" normalizeH="0" baseline="0" noProof="0" dirty="0" err="1">
@@ -10352,7 +10352,7 @@
                 <a:ea typeface="+mn-ea"/>
                 <a:cs typeface="+mn-cs"/>
               </a:rPr>
-              <a:t>квадратка</a:t>
+              <a:t/>
             </a:r>
             <a:r>
               <a:rPr kumimoji="0" lang="en-US" sz="1800" b="0" i="0" u="none" strike="noStrike" kern="1200" cap="none" spc="0" normalizeH="0" baseline="0" noProof="0" dirty="0">
@@ -10369,7 +10369,7 @@
                 <a:ea typeface="+mn-ea"/>
                 <a:cs typeface="+mn-cs"/>
               </a:rPr>
-              <a:t> </a:t>
+              <a:t/>
             </a:r>
             <a:r>
               <a:rPr kumimoji="0" lang="en-US" sz="1800" b="0" i="0" u="none" strike="noStrike" kern="1200" cap="none" spc="0" normalizeH="0" baseline="0" noProof="0" dirty="0" err="1">
@@ -10386,7 +10386,7 @@
                 <a:ea typeface="+mn-ea"/>
                 <a:cs typeface="+mn-cs"/>
               </a:rPr>
-              <a:t>туш</a:t>
+              <a:t/>
             </a:r>
             <a:r>
               <a:rPr kumimoji="0" lang="en-US" sz="1800" b="0" i="0" u="none" strike="noStrike" kern="1200" cap="none" spc="0" normalizeH="0" baseline="0" noProof="0" dirty="0">
@@ -10403,7 +10403,7 @@
                 <a:ea typeface="+mn-ea"/>
                 <a:cs typeface="+mn-cs"/>
               </a:rPr>
-              <a:t> </a:t>
+              <a:t/>
             </a:r>
             <a:r>
               <a:rPr kumimoji="0" lang="en-US" sz="1800" b="0" i="0" u="none" strike="noStrike" kern="1200" cap="none" spc="0" normalizeH="0" baseline="0" noProof="0" dirty="0" err="1">
@@ -10420,7 +10420,7 @@
                 <a:ea typeface="+mn-ea"/>
                 <a:cs typeface="+mn-cs"/>
               </a:rPr>
-              <a:t>келди</a:t>
+              <a:t/>
             </a:r>
             <a:r>
               <a:rPr kumimoji="0" lang="en-US" sz="1800" b="0" i="0" u="none" strike="noStrike" kern="1200" cap="none" spc="0" normalizeH="0" baseline="0" noProof="0" dirty="0">
@@ -10437,7 +10437,7 @@
                 <a:ea typeface="+mn-ea"/>
                 <a:cs typeface="+mn-cs"/>
               </a:rPr>
-              <a:t> </a:t>
+              <a:t/>
             </a:r>
             <a:r>
               <a:rPr kumimoji="0" lang="en-US" sz="1800" b="0" i="0" u="none" strike="noStrike" kern="1200" cap="none" spc="0" normalizeH="0" baseline="0" noProof="0" dirty="0" err="1">
@@ -10454,7 +10454,7 @@
                 <a:ea typeface="+mn-ea"/>
                 <a:cs typeface="+mn-cs"/>
               </a:rPr>
-              <a:t>жайгаштырышы</a:t>
+              <a:t/>
             </a:r>
             <a:r>
               <a:rPr kumimoji="0" lang="en-US" sz="1800" b="0" i="0" u="none" strike="noStrike" kern="1200" cap="none" spc="0" normalizeH="0" baseline="0" noProof="0" dirty="0">
@@ -10471,7 +10471,7 @@
                 <a:ea typeface="+mn-ea"/>
                 <a:cs typeface="+mn-cs"/>
               </a:rPr>
-              <a:t> </a:t>
+              <a:t/>
             </a:r>
             <a:r>
               <a:rPr kumimoji="0" lang="en-US" sz="1800" b="0" i="0" u="none" strike="noStrike" kern="1200" cap="none" spc="0" normalizeH="0" baseline="0" noProof="0" dirty="0" err="1">
@@ -10488,7 +10488,7 @@
                 <a:ea typeface="+mn-ea"/>
                 <a:cs typeface="+mn-cs"/>
               </a:rPr>
-              <a:t>керек</a:t>
+              <a:t/>
             </a:r>
             <a:r>
               <a:rPr kumimoji="0" lang="en-US" sz="1800" b="0" i="0" u="none" strike="noStrike" kern="1200" cap="none" spc="0" normalizeH="0" baseline="0" noProof="0" dirty="0">
@@ -10505,7 +10505,7 @@
                 <a:ea typeface="+mn-ea"/>
                 <a:cs typeface="+mn-cs"/>
               </a:rPr>
-              <a:t>.</a:t>
+              <a:t/>
             </a:r>
           </a:p>
           <a:p>
@@ -13086,7 +13086,7 @@
                   <a:schemeClr val="tx1"/>
                 </a:solidFill>
               </a:rPr>
-              <a:t>12.2</a:t>
+              <a:t>12,2</a:t>
             </a:r>
           </a:p>
         </p:txBody>
@@ -14765,7 +14765,7 @@
                   <a:schemeClr val="tx1"/>
                 </a:solidFill>
               </a:rPr>
-              <a:t>6.7</a:t>
+              <a:t>6,7</a:t>
             </a:r>
           </a:p>
         </p:txBody>
@@ -16444,7 +16444,7 @@
                   <a:schemeClr val="tx1"/>
                 </a:solidFill>
               </a:rPr>
-              <a:t>16.1</a:t>
+              <a:t>16,1</a:t>
             </a:r>
           </a:p>
         </p:txBody>
@@ -18123,7 +18123,7 @@
                   <a:schemeClr val="tx1"/>
                 </a:solidFill>
               </a:rPr>
-              <a:t>13.5</a:t>
+              <a:t>13,5</a:t>
             </a:r>
           </a:p>
         </p:txBody>
@@ -19802,7 +19802,7 @@
                   <a:schemeClr val="tx1"/>
                 </a:solidFill>
               </a:rPr>
-              <a:t>4.7</a:t>
+              <a:t>4,7</a:t>
             </a:r>
           </a:p>
         </p:txBody>
@@ -21481,7 +21481,7 @@
                   <a:schemeClr val="tx1"/>
                 </a:solidFill>
               </a:rPr>
-              <a:t>11.5</a:t>
+              <a:t>11,5</a:t>
             </a:r>
           </a:p>
         </p:txBody>
@@ -23160,7 +23160,7 @@
                   <a:schemeClr val="tx1"/>
                 </a:solidFill>
               </a:rPr>
-              <a:t>18.2</a:t>
+              <a:t>18,2</a:t>
             </a:r>
           </a:p>
         </p:txBody>
@@ -24839,7 +24839,7 @@
                   <a:schemeClr val="tx1"/>
                 </a:solidFill>
               </a:rPr>
-              <a:t>10.4</a:t>
+              <a:t>10,4</a:t>
             </a:r>
           </a:p>
         </p:txBody>
@@ -26518,7 +26518,7 @@
                   <a:schemeClr val="tx1"/>
                 </a:solidFill>
               </a:rPr>
-              <a:t>18.5</a:t>
+              <a:t>18,5</a:t>
             </a:r>
           </a:p>
         </p:txBody>
@@ -28197,7 +28197,7 @@
                   <a:schemeClr val="tx1"/>
                 </a:solidFill>
               </a:rPr>
-              <a:t>10.8</a:t>
+              <a:t>10,8</a:t>
             </a:r>
           </a:p>
         </p:txBody>
@@ -38434,7 +38434,7 @@
                           <a:ea typeface="+mn-ea"/>
                           <a:cs typeface="+mn-cs"/>
                         </a:rPr>
-                        <a:t>16.1</a:t>
+                        <a:t>16,1</a:t>
                       </a:r>
                     </a:p>
                   </a:txBody>
@@ -38517,7 +38517,7 @@
                           <a:ea typeface="+mn-ea"/>
                           <a:cs typeface="+mn-cs"/>
                         </a:rPr>
-                        <a:t>8.5</a:t>
+                        <a:t>8,5</a:t>
                       </a:r>
                     </a:p>
                   </a:txBody>
@@ -38600,7 +38600,7 @@
                           <a:ea typeface="+mn-ea"/>
                           <a:cs typeface="+mn-cs"/>
                         </a:rPr>
-                        <a:t>19.1</a:t>
+                        <a:t>19,1</a:t>
                       </a:r>
                     </a:p>
                   </a:txBody>
@@ -38683,7 +38683,7 @@
                           <a:ea typeface="+mn-ea"/>
                           <a:cs typeface="+mn-cs"/>
                         </a:rPr>
-                        <a:t>11.5</a:t>
+                        <a:t>11,5</a:t>
                       </a:r>
                     </a:p>
                   </a:txBody>
@@ -38773,7 +38773,7 @@
                           <a:ea typeface="+mn-ea"/>
                           <a:cs typeface="+mn-cs"/>
                         </a:rPr>
-                        <a:t>13.5</a:t>
+                        <a:t>13,5</a:t>
                       </a:r>
                     </a:p>
                   </a:txBody>
@@ -38856,7 +38856,7 @@
                           <a:ea typeface="+mn-ea"/>
                           <a:cs typeface="+mn-cs"/>
                         </a:rPr>
-                        <a:t>12.2</a:t>
+                        <a:t>12,2</a:t>
                       </a:r>
                     </a:p>
                   </a:txBody>
@@ -38939,7 +38939,7 @@
                           <a:ea typeface="+mn-ea"/>
                           <a:cs typeface="+mn-cs"/>
                         </a:rPr>
-                        <a:t>3.2</a:t>
+                        <a:t>3,2</a:t>
                       </a:r>
                     </a:p>
                   </a:txBody>
@@ -39022,7 +39022,7 @@
                           <a:ea typeface="+mn-ea"/>
                           <a:cs typeface="+mn-cs"/>
                         </a:rPr>
-                        <a:t>10.8</a:t>
+                        <a:t>10,8</a:t>
                       </a:r>
                     </a:p>
                   </a:txBody>
@@ -39112,7 +39112,7 @@
                           <a:ea typeface="+mn-ea"/>
                           <a:cs typeface="+mn-cs"/>
                         </a:rPr>
-                        <a:t>10.3</a:t>
+                        <a:t>10,3</a:t>
                       </a:r>
                     </a:p>
                   </a:txBody>
@@ -39195,7 +39195,7 @@
                           <a:ea typeface="+mn-ea"/>
                           <a:cs typeface="+mn-cs"/>
                         </a:rPr>
-                        <a:t>18.5</a:t>
+                        <a:t>18,5</a:t>
                       </a:r>
                     </a:p>
                   </a:txBody>
@@ -39278,7 +39278,7 @@
                           <a:ea typeface="+mn-ea"/>
                           <a:cs typeface="+mn-cs"/>
                         </a:rPr>
-                        <a:t>6.7</a:t>
+                        <a:t>6,7</a:t>
                       </a:r>
                     </a:p>
                   </a:txBody>
@@ -39361,7 +39361,7 @@
                           <a:ea typeface="+mn-ea"/>
                           <a:cs typeface="+mn-cs"/>
                         </a:rPr>
-                        <a:t>18.2</a:t>
+                        <a:t>18,2</a:t>
                       </a:r>
                     </a:p>
                   </a:txBody>
@@ -39451,7 +39451,7 @@
                           <a:ea typeface="+mn-ea"/>
                           <a:cs typeface="+mn-cs"/>
                         </a:rPr>
-                        <a:t>15.1</a:t>
+                        <a:t>15,1</a:t>
                       </a:r>
                     </a:p>
                   </a:txBody>
@@ -39534,7 +39534,7 @@
                           <a:ea typeface="+mn-ea"/>
                           <a:cs typeface="+mn-cs"/>
                         </a:rPr>
-                        <a:t>10.4</a:t>
+                        <a:t>10,4</a:t>
                       </a:r>
                     </a:p>
                   </a:txBody>
@@ -39617,7 +39617,7 @@
                           <a:ea typeface="+mn-ea"/>
                           <a:cs typeface="+mn-cs"/>
                         </a:rPr>
-                        <a:t>14.3</a:t>
+                        <a:t>14,3</a:t>
                       </a:r>
                     </a:p>
                   </a:txBody>
@@ -39700,7 +39700,7 @@
                           <a:ea typeface="+mn-ea"/>
                           <a:cs typeface="+mn-cs"/>
                         </a:rPr>
-                        <a:t>4.7</a:t>
+                        <a:t>4,7</a:t>
                       </a:r>
                     </a:p>
                   </a:txBody>
@@ -42026,7 +42026,7 @@
                   <a:schemeClr val="tx1"/>
                 </a:solidFill>
               </a:rPr>
-              <a:t>19.1</a:t>
+              <a:t>19,1</a:t>
             </a:r>
           </a:p>
         </p:txBody>
@@ -43623,7 +43623,7 @@
                   <a:schemeClr val="tx1"/>
                 </a:solidFill>
               </a:rPr>
-              <a:t>15.1</a:t>
+              <a:t>15,1</a:t>
             </a:r>
           </a:p>
         </p:txBody>
@@ -45384,7 +45384,7 @@
                   <a:schemeClr val="tx1"/>
                 </a:solidFill>
               </a:rPr>
-              <a:t>10.3</a:t>
+              <a:t>10,3</a:t>
             </a:r>
           </a:p>
         </p:txBody>
@@ -47063,7 +47063,7 @@
                   <a:schemeClr val="tx1"/>
                 </a:solidFill>
               </a:rPr>
-              <a:t>8.5</a:t>
+              <a:t>8,5</a:t>
             </a:r>
           </a:p>
         </p:txBody>
@@ -48742,7 +48742,7 @@
                   <a:schemeClr val="tx1"/>
                 </a:solidFill>
               </a:rPr>
-              <a:t>14.3</a:t>
+              <a:t>14,3</a:t>
             </a:r>
           </a:p>
         </p:txBody>
@@ -50421,7 +50421,7 @@
                   <a:schemeClr val="tx1"/>
                 </a:solidFill>
               </a:rPr>
-              <a:t>3.2</a:t>
+              <a:t>3,2</a:t>
             </a:r>
           </a:p>
         </p:txBody>
